--- a/2.02IntroductionToJavaScript/JavaScriptVariables.pptx
+++ b/2.02IntroductionToJavaScript/JavaScriptVariables.pptx
@@ -222,7 +222,7 @@
           <a:p>
             <a:fld id="{19104133-B5B0-4351-8158-4F0E5EB1E2BF}" type="datetimeFigureOut">
               <a:rPr lang="en-US" smtClean="0"/>
-              <a:t>8/6/2025</a:t>
+              <a:t>6/8/2026</a:t>
             </a:fld>
             <a:endParaRPr lang="en-US"/>
           </a:p>
@@ -2158,7 +2158,7 @@
             <a:fld id="{1C2D31DE-C454-491C-B5C3-F097855E3DF7}" type="datetime4">
               <a:rPr lang="en-US" smtClean="0"/>
               <a:pPr/>
-              <a:t>August 6, 2025</a:t>
+              <a:t>June 8, 2026</a:t>
             </a:fld>
             <a:endParaRPr lang="en-US" dirty="0"/>
           </a:p>
@@ -5550,7 +5550,7 @@
           <a:p>
             <a:fld id="{5958763E-B898-436D-883D-03711491D54A}" type="datetimeFigureOut">
               <a:rPr lang="en-US" smtClean="0"/>
-              <a:t>8/6/2025</a:t>
+              <a:t>6/8/2026</a:t>
             </a:fld>
             <a:endParaRPr lang="en-US"/>
           </a:p>
@@ -5743,7 +5743,7 @@
           <a:p>
             <a:fld id="{5958763E-B898-436D-883D-03711491D54A}" type="datetimeFigureOut">
               <a:rPr lang="en-US" smtClean="0"/>
-              <a:t>8/6/2025</a:t>
+              <a:t>6/8/2026</a:t>
             </a:fld>
             <a:endParaRPr lang="en-US"/>
           </a:p>
@@ -5993,7 +5993,7 @@
           <a:p>
             <a:fld id="{5958763E-B898-436D-883D-03711491D54A}" type="datetimeFigureOut">
               <a:rPr lang="en-US" smtClean="0"/>
-              <a:t>8/6/2025</a:t>
+              <a:t>6/8/2026</a:t>
             </a:fld>
             <a:endParaRPr lang="en-US"/>
           </a:p>
@@ -6341,7 +6341,7 @@
           <a:p>
             <a:fld id="{5958763E-B898-436D-883D-03711491D54A}" type="datetimeFigureOut">
               <a:rPr lang="en-US" smtClean="0"/>
-              <a:t>8/6/2025</a:t>
+              <a:t>6/8/2026</a:t>
             </a:fld>
             <a:endParaRPr lang="en-US"/>
           </a:p>
@@ -6757,7 +6757,7 @@
           <a:p>
             <a:fld id="{5958763E-B898-436D-883D-03711491D54A}" type="datetimeFigureOut">
               <a:rPr lang="en-US" smtClean="0"/>
-              <a:t>8/6/2025</a:t>
+              <a:t>6/8/2026</a:t>
             </a:fld>
             <a:endParaRPr lang="en-US"/>
           </a:p>
@@ -7258,7 +7258,7 @@
           <a:p>
             <a:fld id="{5958763E-B898-436D-883D-03711491D54A}" type="datetimeFigureOut">
               <a:rPr lang="en-US" smtClean="0"/>
-              <a:t>8/6/2025</a:t>
+              <a:t>6/8/2026</a:t>
             </a:fld>
             <a:endParaRPr lang="en-US"/>
           </a:p>
@@ -7709,7 +7709,7 @@
           <a:p>
             <a:fld id="{5958763E-B898-436D-883D-03711491D54A}" type="datetimeFigureOut">
               <a:rPr lang="en-US" smtClean="0"/>
-              <a:t>8/6/2025</a:t>
+              <a:t>6/8/2026</a:t>
             </a:fld>
             <a:endParaRPr lang="en-US"/>
           </a:p>
@@ -8320,7 +8320,7 @@
           <a:p>
             <a:fld id="{5958763E-B898-436D-883D-03711491D54A}" type="datetimeFigureOut">
               <a:rPr lang="en-US" smtClean="0"/>
-              <a:t>8/6/2025</a:t>
+              <a:t>6/8/2026</a:t>
             </a:fld>
             <a:endParaRPr lang="en-US"/>
           </a:p>
@@ -9091,7 +9091,7 @@
           <a:p>
             <a:fld id="{5958763E-B898-436D-883D-03711491D54A}" type="datetimeFigureOut">
               <a:rPr lang="en-US" smtClean="0"/>
-              <a:t>8/6/2025</a:t>
+              <a:t>6/8/2026</a:t>
             </a:fld>
             <a:endParaRPr lang="en-US"/>
           </a:p>
@@ -9195,7 +9195,7 @@
           <a:p>
             <a:fld id="{5958763E-B898-436D-883D-03711491D54A}" type="datetimeFigureOut">
               <a:rPr lang="en-US" smtClean="0"/>
-              <a:t>8/6/2025</a:t>
+              <a:t>6/8/2026</a:t>
             </a:fld>
             <a:endParaRPr lang="en-US"/>
           </a:p>
@@ -9522,7 +9522,7 @@
             <a:fld id="{1C2D31DE-C454-491C-B5C3-F097855E3DF7}" type="datetime4">
               <a:rPr lang="en-US" smtClean="0"/>
               <a:pPr/>
-              <a:t>August 6, 2025</a:t>
+              <a:t>June 8, 2026</a:t>
             </a:fld>
             <a:endParaRPr lang="en-US" dirty="0"/>
           </a:p>
@@ -12674,7 +12674,7 @@
           <a:p>
             <a:fld id="{5958763E-B898-436D-883D-03711491D54A}" type="datetimeFigureOut">
               <a:rPr lang="en-US" smtClean="0"/>
-              <a:t>8/6/2025</a:t>
+              <a:t>6/8/2026</a:t>
             </a:fld>
             <a:endParaRPr lang="en-US"/>
           </a:p>
@@ -12798,7 +12798,7 @@
           <a:p>
             <a:fld id="{5958763E-B898-436D-883D-03711491D54A}" type="datetimeFigureOut">
               <a:rPr lang="en-US" smtClean="0"/>
-              <a:t>8/6/2025</a:t>
+              <a:t>6/8/2026</a:t>
             </a:fld>
             <a:endParaRPr lang="en-US"/>
           </a:p>
@@ -12922,7 +12922,7 @@
           <a:p>
             <a:fld id="{5958763E-B898-436D-883D-03711491D54A}" type="datetimeFigureOut">
               <a:rPr lang="en-US" smtClean="0"/>
-              <a:t>8/6/2025</a:t>
+              <a:t>6/8/2026</a:t>
             </a:fld>
             <a:endParaRPr lang="en-US"/>
           </a:p>
@@ -13046,7 +13046,7 @@
           <a:p>
             <a:fld id="{5958763E-B898-436D-883D-03711491D54A}" type="datetimeFigureOut">
               <a:rPr lang="en-US" smtClean="0"/>
-              <a:t>8/6/2025</a:t>
+              <a:t>6/8/2026</a:t>
             </a:fld>
             <a:endParaRPr lang="en-US"/>
           </a:p>
@@ -13170,7 +13170,7 @@
           <a:p>
             <a:fld id="{5958763E-B898-436D-883D-03711491D54A}" type="datetimeFigureOut">
               <a:rPr lang="en-US" smtClean="0"/>
-              <a:t>8/6/2025</a:t>
+              <a:t>6/8/2026</a:t>
             </a:fld>
             <a:endParaRPr lang="en-US"/>
           </a:p>
@@ -13294,7 +13294,7 @@
           <a:p>
             <a:fld id="{5958763E-B898-436D-883D-03711491D54A}" type="datetimeFigureOut">
               <a:rPr lang="en-US" smtClean="0"/>
-              <a:t>8/6/2025</a:t>
+              <a:t>6/8/2026</a:t>
             </a:fld>
             <a:endParaRPr lang="en-US"/>
           </a:p>
@@ -13418,7 +13418,7 @@
           <a:p>
             <a:fld id="{5958763E-B898-436D-883D-03711491D54A}" type="datetimeFigureOut">
               <a:rPr lang="en-US" smtClean="0"/>
-              <a:t>8/6/2025</a:t>
+              <a:t>6/8/2026</a:t>
             </a:fld>
             <a:endParaRPr lang="en-US"/>
           </a:p>
@@ -13542,7 +13542,7 @@
           <a:p>
             <a:fld id="{5958763E-B898-436D-883D-03711491D54A}" type="datetimeFigureOut">
               <a:rPr lang="en-US" smtClean="0"/>
-              <a:t>8/6/2025</a:t>
+              <a:t>6/8/2026</a:t>
             </a:fld>
             <a:endParaRPr lang="en-US"/>
           </a:p>
@@ -13675,7 +13675,7 @@
           <a:p>
             <a:fld id="{5958763E-B898-436D-883D-03711491D54A}" type="datetimeFigureOut">
               <a:rPr lang="en-US" smtClean="0"/>
-              <a:t>8/6/2025</a:t>
+              <a:t>6/8/2026</a:t>
             </a:fld>
             <a:endParaRPr lang="en-US"/>
           </a:p>
@@ -17014,7 +17014,7 @@
             <a:fld id="{1C2D31DE-C454-491C-B5C3-F097855E3DF7}" type="datetime4">
               <a:rPr lang="en-US" smtClean="0"/>
               <a:pPr/>
-              <a:t>August 6, 2025</a:t>
+              <a:t>June 8, 2026</a:t>
             </a:fld>
             <a:endParaRPr lang="en-US" dirty="0"/>
           </a:p>
@@ -29250,7 +29250,7 @@
           <a:p>
             <a:fld id="{5958763E-B898-436D-883D-03711491D54A}" type="datetimeFigureOut">
               <a:rPr lang="en-US" smtClean="0"/>
-              <a:t>8/6/2025</a:t>
+              <a:t>6/8/2026</a:t>
             </a:fld>
             <a:endParaRPr lang="en-US"/>
           </a:p>
@@ -29652,7 +29652,7 @@
           <a:p>
             <a:fld id="{5958763E-B898-436D-883D-03711491D54A}" type="datetimeFigureOut">
               <a:rPr lang="en-US" smtClean="0"/>
-              <a:t>8/6/2025</a:t>
+              <a:t>6/8/2026</a:t>
             </a:fld>
             <a:endParaRPr lang="en-US"/>
           </a:p>
@@ -29946,7 +29946,7 @@
           <a:p>
             <a:fld id="{5958763E-B898-436D-883D-03711491D54A}" type="datetimeFigureOut">
               <a:rPr lang="en-US" smtClean="0"/>
-              <a:t>8/6/2025</a:t>
+              <a:t>6/8/2026</a:t>
             </a:fld>
             <a:endParaRPr lang="en-US"/>
           </a:p>
@@ -30147,7 +30147,7 @@
           <a:p>
             <a:fld id="{5958763E-B898-436D-883D-03711491D54A}" type="datetimeFigureOut">
               <a:rPr lang="en-US" smtClean="0"/>
-              <a:t>8/6/2025</a:t>
+              <a:t>6/8/2026</a:t>
             </a:fld>
             <a:endParaRPr lang="en-US"/>
           </a:p>
@@ -30408,7 +30408,7 @@
           <a:p>
             <a:fld id="{5958763E-B898-436D-883D-03711491D54A}" type="datetimeFigureOut">
               <a:rPr lang="en-US" smtClean="0"/>
-              <a:t>8/6/2025</a:t>
+              <a:t>6/8/2026</a:t>
             </a:fld>
             <a:endParaRPr lang="en-US"/>
           </a:p>
@@ -30916,7 +30916,7 @@
           <a:p>
             <a:fld id="{5958763E-B898-436D-883D-03711491D54A}" type="datetimeFigureOut">
               <a:rPr lang="en-US" smtClean="0"/>
-              <a:t>8/6/2025</a:t>
+              <a:t>6/8/2026</a:t>
             </a:fld>
             <a:endParaRPr lang="en-US"/>
           </a:p>
@@ -31395,7 +31395,7 @@
           <a:p>
             <a:fld id="{5958763E-B898-436D-883D-03711491D54A}" type="datetimeFigureOut">
               <a:rPr lang="en-US" smtClean="0"/>
-              <a:t>8/6/2025</a:t>
+              <a:t>6/8/2026</a:t>
             </a:fld>
             <a:endParaRPr lang="en-US"/>
           </a:p>
@@ -32214,7 +32214,7 @@
           <a:p>
             <a:fld id="{5958763E-B898-436D-883D-03711491D54A}" type="datetimeFigureOut">
               <a:rPr lang="en-US" smtClean="0"/>
-              <a:t>8/6/2025</a:t>
+              <a:t>6/8/2026</a:t>
             </a:fld>
             <a:endParaRPr lang="en-US"/>
           </a:p>
@@ -32415,7 +32415,7 @@
           <a:p>
             <a:fld id="{5958763E-B898-436D-883D-03711491D54A}" type="datetimeFigureOut">
               <a:rPr lang="en-US" smtClean="0"/>
-              <a:t>8/6/2025</a:t>
+              <a:t>6/8/2026</a:t>
             </a:fld>
             <a:endParaRPr lang="en-US"/>
           </a:p>
@@ -32750,7 +32750,7 @@
           <a:p>
             <a:fld id="{5958763E-B898-436D-883D-03711491D54A}" type="datetimeFigureOut">
               <a:rPr lang="en-US" smtClean="0"/>
-              <a:t>8/6/2025</a:t>
+              <a:t>6/8/2026</a:t>
             </a:fld>
             <a:endParaRPr lang="en-US"/>
           </a:p>
@@ -32980,7 +32980,7 @@
           <a:p>
             <a:fld id="{5958763E-B898-436D-883D-03711491D54A}" type="datetimeFigureOut">
               <a:rPr lang="en-US" smtClean="0"/>
-              <a:t>8/6/2025</a:t>
+              <a:t>6/8/2026</a:t>
             </a:fld>
             <a:endParaRPr lang="en-US"/>
           </a:p>
@@ -33224,7 +33224,7 @@
           <a:p>
             <a:fld id="{5958763E-B898-436D-883D-03711491D54A}" type="datetimeFigureOut">
               <a:rPr lang="en-US" smtClean="0"/>
-              <a:t>8/6/2025</a:t>
+              <a:t>6/8/2026</a:t>
             </a:fld>
             <a:endParaRPr lang="en-US"/>
           </a:p>
@@ -33772,7 +33772,7 @@
         <p:spPr>
           <a:xfrm>
             <a:off x="381000" y="3429000"/>
-            <a:ext cx="4883068" cy="553998"/>
+            <a:ext cx="5859489" cy="553998"/>
           </a:xfrm>
         </p:spPr>
         <p:txBody>
@@ -33781,7 +33781,7 @@
           <a:p>
             <a:r>
               <a:rPr lang="en-US" dirty="0"/>
-              <a:t>Hy-Tech Club: Web 102</a:t>
+              <a:t>HTO: Website Development</a:t>
             </a:r>
           </a:p>
         </p:txBody>
